--- a/AGENTIC_PROMPT_INJECTION_FIREWALL_Pitch_Deck.pptx
+++ b/AGENTIC_PROMPT_INJECTION_FIREWALL_Pitch_Deck.pptx
@@ -3721,7 +3721,7 @@
         <p:spPr>
           <a:xfrm>
             <a:off x="503047" y="5715000"/>
-            <a:ext cx="10698480" cy="429895"/>
+            <a:ext cx="10698480" cy="598805"/>
           </a:xfrm>
           <a:prstGeom prst="rect">
             <a:avLst/>
@@ -3742,7 +3742,33 @@
                 </a:solidFill>
                 <a:latin typeface="Arial" panose="020B0604020202090204"/>
               </a:rPr>
-              <a:t>Prototype by Gaurav Ahuja
+              <a:t>Prototype by Gaurav Ahuja</a:t>
+            </a:r>
+            <a:br>
+              <a:rPr sz="1100" b="0">
+                <a:solidFill>
+                  <a:srgbClr val="AAB7CC"/>
+                </a:solidFill>
+                <a:latin typeface="Arial" panose="020B0604020202090204"/>
+              </a:rPr>
+            </a:br>
+            <a:r>
+              <a:rPr lang="en-US" sz="1100" b="0">
+                <a:solidFill>
+                  <a:srgbClr val="AAB7CC"/>
+                </a:solidFill>
+                <a:latin typeface="Arial" panose="020B0604020202090204"/>
+              </a:rPr>
+              <a:t>Working- Accenture(Full Stack LLM deployment Manager)</a:t>
+            </a:r>
+            <a:r>
+              <a:rPr sz="1100" b="0">
+                <a:solidFill>
+                  <a:srgbClr val="AAB7CC"/>
+                </a:solidFill>
+                <a:latin typeface="Arial" panose="020B0604020202090204"/>
+              </a:rPr>
+              <a:t>
 GitHub: </a:t>
             </a:r>
             <a:r>
@@ -6304,7 +6330,7 @@
         <p:spPr>
           <a:xfrm>
             <a:off x="2148840" y="4160520"/>
-            <a:ext cx="8046720" cy="274320"/>
+            <a:ext cx="8046720" cy="291465"/>
           </a:xfrm>
           <a:prstGeom prst="rect">
             <a:avLst/>
@@ -6325,7 +6351,79 @@
                 </a:solidFill>
                 <a:latin typeface="Arial" panose="020B0604020202090204"/>
               </a:rPr>
-              <a:t>app.py | firewall.py | run_demo.py | tests/ | samples/ | README.md | demo_script.md</a:t>
+              <a:t>app.py | </a:t>
+            </a:r>
+            <a:r>
+              <a:rPr lang="en-US" sz="1300" b="0">
+                <a:solidFill>
+                  <a:srgbClr val="F5F8FC"/>
+                </a:solidFill>
+                <a:latin typeface="Arial" panose="020B0604020202090204"/>
+              </a:rPr>
+              <a:t>app</a:t>
+            </a:r>
+            <a:r>
+              <a:rPr sz="1300" b="0">
+                <a:solidFill>
+                  <a:srgbClr val="F5F8FC"/>
+                </a:solidFill>
+                <a:latin typeface="Arial" panose="020B0604020202090204"/>
+              </a:rPr>
+              <a:t>.py | </a:t>
+            </a:r>
+            <a:r>
+              <a:rPr lang="en-US" sz="1300" b="0">
+                <a:solidFill>
+                  <a:srgbClr val="F5F8FC"/>
+                </a:solidFill>
+                <a:latin typeface="Arial" panose="020B0604020202090204"/>
+              </a:rPr>
+              <a:t>Firewall</a:t>
+            </a:r>
+            <a:r>
+              <a:rPr sz="1300" b="0">
+                <a:solidFill>
+                  <a:srgbClr val="F5F8FC"/>
+                </a:solidFill>
+                <a:latin typeface="Arial" panose="020B0604020202090204"/>
+              </a:rPr>
+              <a:t>.py | </a:t>
+            </a:r>
+            <a:r>
+              <a:rPr lang="en-US" sz="1300" b="0">
+                <a:solidFill>
+                  <a:srgbClr val="F5F8FC"/>
+                </a:solidFill>
+                <a:latin typeface="Arial" panose="020B0604020202090204"/>
+              </a:rPr>
+              <a:t>watchdog.py</a:t>
+            </a:r>
+            <a:r>
+              <a:rPr sz="1300" b="0">
+                <a:solidFill>
+                  <a:srgbClr val="F5F8FC"/>
+                </a:solidFill>
+                <a:latin typeface="Arial" panose="020B0604020202090204"/>
+              </a:rPr>
+              <a:t> | </a:t>
+            </a:r>
+            <a:r>
+              <a:rPr lang="en-US" sz="1300" b="0">
+                <a:solidFill>
+                  <a:srgbClr val="F5F8FC"/>
+                </a:solidFill>
+                <a:latin typeface="Arial" panose="020B0604020202090204"/>
+              </a:rPr>
+              <a:t>testfirewall.py | Demo_Cases_100.json</a:t>
+            </a:r>
+            <a:r>
+              <a:rPr sz="1300" b="0">
+                <a:solidFill>
+                  <a:srgbClr val="F5F8FC"/>
+                </a:solidFill>
+                <a:latin typeface="Arial" panose="020B0604020202090204"/>
+              </a:rPr>
+              <a:t> | README.md</a:t>
             </a:r>
             <a:endParaRPr sz="1300" b="0">
               <a:solidFill>
